--- a/Instats/Day-1/Session-2/likelihood-regression-instats.pptx
+++ b/Instats/Day-1/Session-2/likelihood-regression-instats.pptx
@@ -267,7 +267,7 @@
           <a:p>
             <a:fld id="{287C9ABC-0C1C-4801-85B9-12829D42DDA4}" type="datetimeFigureOut">
               <a:rPr lang="en-AU" smtClean="0"/>
-              <a:t>24/3/2025</a:t>
+              <a:t>25/3/2025</a:t>
             </a:fld>
             <a:endParaRPr lang="en-AU"/>
           </a:p>
@@ -467,7 +467,7 @@
           <a:p>
             <a:fld id="{287C9ABC-0C1C-4801-85B9-12829D42DDA4}" type="datetimeFigureOut">
               <a:rPr lang="en-AU" smtClean="0"/>
-              <a:t>24/3/2025</a:t>
+              <a:t>25/3/2025</a:t>
             </a:fld>
             <a:endParaRPr lang="en-AU"/>
           </a:p>
@@ -677,7 +677,7 @@
           <a:p>
             <a:fld id="{287C9ABC-0C1C-4801-85B9-12829D42DDA4}" type="datetimeFigureOut">
               <a:rPr lang="en-AU" smtClean="0"/>
-              <a:t>24/3/2025</a:t>
+              <a:t>25/3/2025</a:t>
             </a:fld>
             <a:endParaRPr lang="en-AU"/>
           </a:p>
@@ -877,7 +877,7 @@
           <a:p>
             <a:fld id="{287C9ABC-0C1C-4801-85B9-12829D42DDA4}" type="datetimeFigureOut">
               <a:rPr lang="en-AU" smtClean="0"/>
-              <a:t>24/3/2025</a:t>
+              <a:t>25/3/2025</a:t>
             </a:fld>
             <a:endParaRPr lang="en-AU"/>
           </a:p>
@@ -1153,7 +1153,7 @@
           <a:p>
             <a:fld id="{287C9ABC-0C1C-4801-85B9-12829D42DDA4}" type="datetimeFigureOut">
               <a:rPr lang="en-AU" smtClean="0"/>
-              <a:t>24/3/2025</a:t>
+              <a:t>25/3/2025</a:t>
             </a:fld>
             <a:endParaRPr lang="en-AU"/>
           </a:p>
@@ -1421,7 +1421,7 @@
           <a:p>
             <a:fld id="{287C9ABC-0C1C-4801-85B9-12829D42DDA4}" type="datetimeFigureOut">
               <a:rPr lang="en-AU" smtClean="0"/>
-              <a:t>24/3/2025</a:t>
+              <a:t>25/3/2025</a:t>
             </a:fld>
             <a:endParaRPr lang="en-AU"/>
           </a:p>
@@ -1836,7 +1836,7 @@
           <a:p>
             <a:fld id="{287C9ABC-0C1C-4801-85B9-12829D42DDA4}" type="datetimeFigureOut">
               <a:rPr lang="en-AU" smtClean="0"/>
-              <a:t>24/3/2025</a:t>
+              <a:t>25/3/2025</a:t>
             </a:fld>
             <a:endParaRPr lang="en-AU"/>
           </a:p>
@@ -1978,7 +1978,7 @@
           <a:p>
             <a:fld id="{287C9ABC-0C1C-4801-85B9-12829D42DDA4}" type="datetimeFigureOut">
               <a:rPr lang="en-AU" smtClean="0"/>
-              <a:t>24/3/2025</a:t>
+              <a:t>25/3/2025</a:t>
             </a:fld>
             <a:endParaRPr lang="en-AU"/>
           </a:p>
@@ -2091,7 +2091,7 @@
           <a:p>
             <a:fld id="{287C9ABC-0C1C-4801-85B9-12829D42DDA4}" type="datetimeFigureOut">
               <a:rPr lang="en-AU" smtClean="0"/>
-              <a:t>24/3/2025</a:t>
+              <a:t>25/3/2025</a:t>
             </a:fld>
             <a:endParaRPr lang="en-AU"/>
           </a:p>
@@ -2404,7 +2404,7 @@
           <a:p>
             <a:fld id="{287C9ABC-0C1C-4801-85B9-12829D42DDA4}" type="datetimeFigureOut">
               <a:rPr lang="en-AU" smtClean="0"/>
-              <a:t>24/3/2025</a:t>
+              <a:t>25/3/2025</a:t>
             </a:fld>
             <a:endParaRPr lang="en-AU"/>
           </a:p>
@@ -2693,7 +2693,7 @@
           <a:p>
             <a:fld id="{287C9ABC-0C1C-4801-85B9-12829D42DDA4}" type="datetimeFigureOut">
               <a:rPr lang="en-AU" smtClean="0"/>
-              <a:t>24/3/2025</a:t>
+              <a:t>25/3/2025</a:t>
             </a:fld>
             <a:endParaRPr lang="en-AU"/>
           </a:p>
@@ -2936,7 +2936,7 @@
           <a:p>
             <a:fld id="{287C9ABC-0C1C-4801-85B9-12829D42DDA4}" type="datetimeFigureOut">
               <a:rPr lang="en-AU" smtClean="0"/>
-              <a:t>24/3/2025</a:t>
+              <a:t>25/3/2025</a:t>
             </a:fld>
             <a:endParaRPr lang="en-AU"/>
           </a:p>
@@ -3692,22 +3692,10 @@
           <a:lstStyle/>
           <a:p>
             <a:r>
-              <a:rPr lang="en-AU" sz="7200" dirty="0" err="1">
+              <a:rPr lang="en-AU" sz="7200">
                 <a:latin typeface="Montserrat SemiBold" panose="00000700000000000000" pitchFamily="50" charset="0"/>
               </a:rPr>
-              <a:t>simmr</a:t>
-            </a:r>
-            <a:r>
-              <a:rPr lang="en-AU" sz="7200" dirty="0">
-                <a:latin typeface="Montserrat SemiBold" panose="00000700000000000000" pitchFamily="50" charset="0"/>
-              </a:rPr>
-              <a:t>-practical-</a:t>
-            </a:r>
-            <a:r>
-              <a:rPr lang="en-AU" sz="7200" dirty="0" err="1">
-                <a:latin typeface="Montserrat SemiBold" panose="00000700000000000000" pitchFamily="50" charset="0"/>
-              </a:rPr>
-              <a:t>instats.pptx</a:t>
+              <a:t>Stable Isotope Mixing Models in R</a:t>
             </a:r>
             <a:endParaRPr lang="en-AU" sz="7200" dirty="0">
               <a:latin typeface="Montserrat SemiBold" panose="00000700000000000000" pitchFamily="50" charset="0"/>
